--- a/courses/theory/slides/lec09-euf.pptx
+++ b/courses/theory/slides/lec09-euf.pptx
@@ -6799,10 +6799,18 @@
           <a:p>
             <a:pPr algn="ctr"/>
             <a:r>
-              <a:rPr kumimoji="1" lang="en-US" altLang="zh-CN" dirty="0"/>
+              <a:rPr kumimoji="1" lang="en-US" altLang="zh-CN" dirty="0">
+                <a:solidFill>
+                  <a:schemeClr val="tx1"/>
+                </a:solidFill>
+              </a:rPr>
               <a:t>c</a:t>
             </a:r>
-            <a:endParaRPr kumimoji="1" lang="zh-CN" altLang="en-US" dirty="0"/>
+            <a:endParaRPr kumimoji="1" lang="zh-CN" altLang="en-US" dirty="0">
+              <a:solidFill>
+                <a:schemeClr val="tx1"/>
+              </a:solidFill>
+            </a:endParaRPr>
           </a:p>
         </p:txBody>
       </p:sp>
@@ -6849,10 +6857,18 @@
           <a:p>
             <a:pPr algn="ctr"/>
             <a:r>
-              <a:rPr kumimoji="1" lang="en-US" altLang="zh-CN" dirty="0"/>
+              <a:rPr kumimoji="1" lang="en-US" altLang="zh-CN" dirty="0">
+                <a:solidFill>
+                  <a:schemeClr val="tx1"/>
+                </a:solidFill>
+              </a:rPr>
               <a:t>d</a:t>
             </a:r>
-            <a:endParaRPr kumimoji="1" lang="zh-CN" altLang="en-US" dirty="0"/>
+            <a:endParaRPr kumimoji="1" lang="zh-CN" altLang="en-US" dirty="0">
+              <a:solidFill>
+                <a:schemeClr val="tx1"/>
+              </a:solidFill>
+            </a:endParaRPr>
           </a:p>
         </p:txBody>
       </p:sp>
@@ -6899,10 +6915,18 @@
           <a:p>
             <a:pPr algn="ctr"/>
             <a:r>
-              <a:rPr kumimoji="1" lang="en-US" altLang="zh-CN" dirty="0"/>
+              <a:rPr kumimoji="1" lang="en-US" altLang="zh-CN" dirty="0">
+                <a:solidFill>
+                  <a:schemeClr val="tx1"/>
+                </a:solidFill>
+              </a:rPr>
               <a:t>e</a:t>
             </a:r>
-            <a:endParaRPr kumimoji="1" lang="zh-CN" altLang="en-US" dirty="0"/>
+            <a:endParaRPr kumimoji="1" lang="zh-CN" altLang="en-US" dirty="0">
+              <a:solidFill>
+                <a:schemeClr val="tx1"/>
+              </a:solidFill>
+            </a:endParaRPr>
           </a:p>
         </p:txBody>
       </p:sp>
@@ -6949,10 +6973,18 @@
           <a:p>
             <a:pPr algn="ctr"/>
             <a:r>
-              <a:rPr kumimoji="1" lang="en-US" altLang="zh-CN" dirty="0"/>
+              <a:rPr kumimoji="1" lang="en-US" altLang="zh-CN" dirty="0">
+                <a:solidFill>
+                  <a:schemeClr val="tx1"/>
+                </a:solidFill>
+              </a:rPr>
               <a:t>s</a:t>
             </a:r>
-            <a:endParaRPr kumimoji="1" lang="zh-CN" altLang="en-US" dirty="0"/>
+            <a:endParaRPr kumimoji="1" lang="zh-CN" altLang="en-US" dirty="0">
+              <a:solidFill>
+                <a:schemeClr val="tx1"/>
+              </a:solidFill>
+            </a:endParaRPr>
           </a:p>
         </p:txBody>
       </p:sp>
@@ -6999,10 +7031,18 @@
           <a:p>
             <a:pPr algn="ctr"/>
             <a:r>
-              <a:rPr kumimoji="1" lang="en-US" altLang="zh-CN" dirty="0"/>
+              <a:rPr kumimoji="1" lang="en-US" altLang="zh-CN" dirty="0">
+                <a:solidFill>
+                  <a:schemeClr val="tx1"/>
+                </a:solidFill>
+              </a:rPr>
               <a:t>t</a:t>
             </a:r>
-            <a:endParaRPr kumimoji="1" lang="zh-CN" altLang="en-US" dirty="0"/>
+            <a:endParaRPr kumimoji="1" lang="zh-CN" altLang="en-US" dirty="0">
+              <a:solidFill>
+                <a:schemeClr val="tx1"/>
+              </a:solidFill>
+            </a:endParaRPr>
           </a:p>
         </p:txBody>
       </p:sp>
@@ -7213,10 +7253,18 @@
           <a:p>
             <a:pPr algn="ctr"/>
             <a:r>
-              <a:rPr kumimoji="1" lang="en-US" altLang="zh-CN" dirty="0"/>
+              <a:rPr kumimoji="1" lang="en-US" altLang="zh-CN" dirty="0">
+                <a:solidFill>
+                  <a:schemeClr val="tx1"/>
+                </a:solidFill>
+              </a:rPr>
               <a:t>c</a:t>
             </a:r>
-            <a:endParaRPr kumimoji="1" lang="zh-CN" altLang="en-US" dirty="0"/>
+            <a:endParaRPr kumimoji="1" lang="zh-CN" altLang="en-US" dirty="0">
+              <a:solidFill>
+                <a:schemeClr val="tx1"/>
+              </a:solidFill>
+            </a:endParaRPr>
           </a:p>
         </p:txBody>
       </p:sp>
@@ -7263,10 +7311,18 @@
           <a:p>
             <a:pPr algn="ctr"/>
             <a:r>
-              <a:rPr kumimoji="1" lang="en-US" altLang="zh-CN" dirty="0"/>
+              <a:rPr kumimoji="1" lang="en-US" altLang="zh-CN" dirty="0">
+                <a:solidFill>
+                  <a:schemeClr val="tx1"/>
+                </a:solidFill>
+              </a:rPr>
               <a:t>d</a:t>
             </a:r>
-            <a:endParaRPr kumimoji="1" lang="zh-CN" altLang="en-US" dirty="0"/>
+            <a:endParaRPr kumimoji="1" lang="zh-CN" altLang="en-US" dirty="0">
+              <a:solidFill>
+                <a:schemeClr val="tx1"/>
+              </a:solidFill>
+            </a:endParaRPr>
           </a:p>
         </p:txBody>
       </p:sp>
@@ -7313,10 +7369,18 @@
           <a:p>
             <a:pPr algn="ctr"/>
             <a:r>
-              <a:rPr kumimoji="1" lang="en-US" altLang="zh-CN" dirty="0"/>
+              <a:rPr kumimoji="1" lang="en-US" altLang="zh-CN" dirty="0">
+                <a:solidFill>
+                  <a:schemeClr val="tx1"/>
+                </a:solidFill>
+              </a:rPr>
               <a:t>e</a:t>
             </a:r>
-            <a:endParaRPr kumimoji="1" lang="zh-CN" altLang="en-US" dirty="0"/>
+            <a:endParaRPr kumimoji="1" lang="zh-CN" altLang="en-US" dirty="0">
+              <a:solidFill>
+                <a:schemeClr val="tx1"/>
+              </a:solidFill>
+            </a:endParaRPr>
           </a:p>
         </p:txBody>
       </p:sp>
@@ -7363,10 +7427,18 @@
           <a:p>
             <a:pPr algn="ctr"/>
             <a:r>
-              <a:rPr kumimoji="1" lang="en-US" altLang="zh-CN" dirty="0"/>
+              <a:rPr kumimoji="1" lang="en-US" altLang="zh-CN" dirty="0">
+                <a:solidFill>
+                  <a:schemeClr val="tx1"/>
+                </a:solidFill>
+              </a:rPr>
               <a:t>s</a:t>
             </a:r>
-            <a:endParaRPr kumimoji="1" lang="zh-CN" altLang="en-US" dirty="0"/>
+            <a:endParaRPr kumimoji="1" lang="zh-CN" altLang="en-US" dirty="0">
+              <a:solidFill>
+                <a:schemeClr val="tx1"/>
+              </a:solidFill>
+            </a:endParaRPr>
           </a:p>
         </p:txBody>
       </p:sp>
@@ -7413,10 +7485,18 @@
           <a:p>
             <a:pPr algn="ctr"/>
             <a:r>
-              <a:rPr kumimoji="1" lang="en-US" altLang="zh-CN" dirty="0"/>
+              <a:rPr kumimoji="1" lang="en-US" altLang="zh-CN" dirty="0">
+                <a:solidFill>
+                  <a:schemeClr val="tx1"/>
+                </a:solidFill>
+              </a:rPr>
               <a:t>t</a:t>
             </a:r>
-            <a:endParaRPr kumimoji="1" lang="zh-CN" altLang="en-US" dirty="0"/>
+            <a:endParaRPr kumimoji="1" lang="zh-CN" altLang="en-US" dirty="0">
+              <a:solidFill>
+                <a:schemeClr val="tx1"/>
+              </a:solidFill>
+            </a:endParaRPr>
           </a:p>
         </p:txBody>
       </p:sp>
@@ -7697,10 +7777,18 @@
           <a:p>
             <a:pPr algn="ctr"/>
             <a:r>
-              <a:rPr kumimoji="1" lang="en-US" altLang="zh-CN" dirty="0"/>
+              <a:rPr kumimoji="1" lang="en-US" altLang="zh-CN" dirty="0">
+                <a:solidFill>
+                  <a:schemeClr val="tx1"/>
+                </a:solidFill>
+              </a:rPr>
               <a:t>d</a:t>
             </a:r>
-            <a:endParaRPr kumimoji="1" lang="zh-CN" altLang="en-US" dirty="0"/>
+            <a:endParaRPr kumimoji="1" lang="zh-CN" altLang="en-US" dirty="0">
+              <a:solidFill>
+                <a:schemeClr val="tx1"/>
+              </a:solidFill>
+            </a:endParaRPr>
           </a:p>
         </p:txBody>
       </p:sp>
@@ -7747,10 +7835,18 @@
           <a:p>
             <a:pPr algn="ctr"/>
             <a:r>
-              <a:rPr kumimoji="1" lang="en-US" altLang="zh-CN" dirty="0"/>
+              <a:rPr kumimoji="1" lang="en-US" altLang="zh-CN" dirty="0">
+                <a:solidFill>
+                  <a:schemeClr val="tx1"/>
+                </a:solidFill>
+              </a:rPr>
               <a:t>e</a:t>
             </a:r>
-            <a:endParaRPr kumimoji="1" lang="zh-CN" altLang="en-US" dirty="0"/>
+            <a:endParaRPr kumimoji="1" lang="zh-CN" altLang="en-US" dirty="0">
+              <a:solidFill>
+                <a:schemeClr val="tx1"/>
+              </a:solidFill>
+            </a:endParaRPr>
           </a:p>
         </p:txBody>
       </p:sp>
@@ -7797,10 +7893,18 @@
           <a:p>
             <a:pPr algn="ctr"/>
             <a:r>
-              <a:rPr kumimoji="1" lang="en-US" altLang="zh-CN" dirty="0"/>
+              <a:rPr kumimoji="1" lang="en-US" altLang="zh-CN" dirty="0">
+                <a:solidFill>
+                  <a:schemeClr val="tx1"/>
+                </a:solidFill>
+              </a:rPr>
               <a:t>s</a:t>
             </a:r>
-            <a:endParaRPr kumimoji="1" lang="zh-CN" altLang="en-US" dirty="0"/>
+            <a:endParaRPr kumimoji="1" lang="zh-CN" altLang="en-US" dirty="0">
+              <a:solidFill>
+                <a:schemeClr val="tx1"/>
+              </a:solidFill>
+            </a:endParaRPr>
           </a:p>
         </p:txBody>
       </p:sp>
@@ -7847,10 +7951,18 @@
           <a:p>
             <a:pPr algn="ctr"/>
             <a:r>
-              <a:rPr kumimoji="1" lang="en-US" altLang="zh-CN" dirty="0"/>
+              <a:rPr kumimoji="1" lang="en-US" altLang="zh-CN" dirty="0">
+                <a:solidFill>
+                  <a:schemeClr val="tx1"/>
+                </a:solidFill>
+              </a:rPr>
               <a:t>t</a:t>
             </a:r>
-            <a:endParaRPr kumimoji="1" lang="zh-CN" altLang="en-US" dirty="0"/>
+            <a:endParaRPr kumimoji="1" lang="zh-CN" altLang="en-US" dirty="0">
+              <a:solidFill>
+                <a:schemeClr val="tx1"/>
+              </a:solidFill>
+            </a:endParaRPr>
           </a:p>
         </p:txBody>
       </p:sp>
@@ -8073,10 +8185,18 @@
           <a:p>
             <a:pPr algn="ctr"/>
             <a:r>
-              <a:rPr kumimoji="1" lang="en-US" altLang="zh-CN" dirty="0"/>
+              <a:rPr kumimoji="1" lang="en-US" altLang="zh-CN" dirty="0">
+                <a:solidFill>
+                  <a:schemeClr val="tx1"/>
+                </a:solidFill>
+              </a:rPr>
               <a:t>d</a:t>
             </a:r>
-            <a:endParaRPr kumimoji="1" lang="zh-CN" altLang="en-US" dirty="0"/>
+            <a:endParaRPr kumimoji="1" lang="zh-CN" altLang="en-US" dirty="0">
+              <a:solidFill>
+                <a:schemeClr val="tx1"/>
+              </a:solidFill>
+            </a:endParaRPr>
           </a:p>
         </p:txBody>
       </p:sp>
@@ -8123,10 +8243,18 @@
           <a:p>
             <a:pPr algn="ctr"/>
             <a:r>
-              <a:rPr kumimoji="1" lang="en-US" altLang="zh-CN" dirty="0"/>
+              <a:rPr kumimoji="1" lang="en-US" altLang="zh-CN" dirty="0">
+                <a:solidFill>
+                  <a:schemeClr val="tx1"/>
+                </a:solidFill>
+              </a:rPr>
               <a:t>e</a:t>
             </a:r>
-            <a:endParaRPr kumimoji="1" lang="zh-CN" altLang="en-US" dirty="0"/>
+            <a:endParaRPr kumimoji="1" lang="zh-CN" altLang="en-US" dirty="0">
+              <a:solidFill>
+                <a:schemeClr val="tx1"/>
+              </a:solidFill>
+            </a:endParaRPr>
           </a:p>
         </p:txBody>
       </p:sp>
@@ -8173,10 +8301,18 @@
           <a:p>
             <a:pPr algn="ctr"/>
             <a:r>
-              <a:rPr kumimoji="1" lang="en-US" altLang="zh-CN" dirty="0"/>
+              <a:rPr kumimoji="1" lang="en-US" altLang="zh-CN" dirty="0">
+                <a:solidFill>
+                  <a:schemeClr val="tx1"/>
+                </a:solidFill>
+              </a:rPr>
               <a:t>s</a:t>
             </a:r>
-            <a:endParaRPr kumimoji="1" lang="zh-CN" altLang="en-US" dirty="0"/>
+            <a:endParaRPr kumimoji="1" lang="zh-CN" altLang="en-US" dirty="0">
+              <a:solidFill>
+                <a:schemeClr val="tx1"/>
+              </a:solidFill>
+            </a:endParaRPr>
           </a:p>
         </p:txBody>
       </p:sp>
@@ -8223,10 +8359,18 @@
           <a:p>
             <a:pPr algn="ctr"/>
             <a:r>
-              <a:rPr kumimoji="1" lang="en-US" altLang="zh-CN" dirty="0"/>
+              <a:rPr kumimoji="1" lang="en-US" altLang="zh-CN" dirty="0">
+                <a:solidFill>
+                  <a:schemeClr val="tx1"/>
+                </a:solidFill>
+              </a:rPr>
               <a:t>t</a:t>
             </a:r>
-            <a:endParaRPr kumimoji="1" lang="zh-CN" altLang="en-US" dirty="0"/>
+            <a:endParaRPr kumimoji="1" lang="zh-CN" altLang="en-US" dirty="0">
+              <a:solidFill>
+                <a:schemeClr val="tx1"/>
+              </a:solidFill>
+            </a:endParaRPr>
           </a:p>
         </p:txBody>
       </p:sp>
@@ -8557,10 +8701,18 @@
           <a:p>
             <a:pPr algn="ctr"/>
             <a:r>
-              <a:rPr kumimoji="1" lang="en-US" altLang="zh-CN" dirty="0"/>
+              <a:rPr kumimoji="1" lang="en-US" altLang="zh-CN" dirty="0">
+                <a:solidFill>
+                  <a:schemeClr val="tx1"/>
+                </a:solidFill>
+              </a:rPr>
               <a:t>s</a:t>
             </a:r>
-            <a:endParaRPr kumimoji="1" lang="zh-CN" altLang="en-US" dirty="0"/>
+            <a:endParaRPr kumimoji="1" lang="zh-CN" altLang="en-US" dirty="0">
+              <a:solidFill>
+                <a:schemeClr val="tx1"/>
+              </a:solidFill>
+            </a:endParaRPr>
           </a:p>
         </p:txBody>
       </p:sp>
@@ -8607,10 +8759,18 @@
           <a:p>
             <a:pPr algn="ctr"/>
             <a:r>
-              <a:rPr kumimoji="1" lang="en-US" altLang="zh-CN" dirty="0"/>
+              <a:rPr kumimoji="1" lang="en-US" altLang="zh-CN" dirty="0">
+                <a:solidFill>
+                  <a:schemeClr val="tx1"/>
+                </a:solidFill>
+              </a:rPr>
               <a:t>t</a:t>
             </a:r>
-            <a:endParaRPr kumimoji="1" lang="zh-CN" altLang="en-US" dirty="0"/>
+            <a:endParaRPr kumimoji="1" lang="zh-CN" altLang="en-US" dirty="0">
+              <a:solidFill>
+                <a:schemeClr val="tx1"/>
+              </a:solidFill>
+            </a:endParaRPr>
           </a:p>
         </p:txBody>
       </p:sp>
@@ -8883,10 +9043,18 @@
           <a:p>
             <a:pPr algn="ctr"/>
             <a:r>
-              <a:rPr kumimoji="1" lang="en-US" altLang="zh-CN" dirty="0"/>
+              <a:rPr kumimoji="1" lang="en-US" altLang="zh-CN" dirty="0">
+                <a:solidFill>
+                  <a:schemeClr val="tx1"/>
+                </a:solidFill>
+              </a:rPr>
               <a:t>s</a:t>
             </a:r>
-            <a:endParaRPr kumimoji="1" lang="zh-CN" altLang="en-US" dirty="0"/>
+            <a:endParaRPr kumimoji="1" lang="zh-CN" altLang="en-US" dirty="0">
+              <a:solidFill>
+                <a:schemeClr val="tx1"/>
+              </a:solidFill>
+            </a:endParaRPr>
           </a:p>
         </p:txBody>
       </p:sp>
@@ -8933,10 +9101,18 @@
           <a:p>
             <a:pPr algn="ctr"/>
             <a:r>
-              <a:rPr kumimoji="1" lang="en-US" altLang="zh-CN" dirty="0"/>
+              <a:rPr kumimoji="1" lang="en-US" altLang="zh-CN" dirty="0">
+                <a:solidFill>
+                  <a:schemeClr val="tx1"/>
+                </a:solidFill>
+              </a:rPr>
               <a:t>t</a:t>
             </a:r>
-            <a:endParaRPr kumimoji="1" lang="zh-CN" altLang="en-US" dirty="0"/>
+            <a:endParaRPr kumimoji="1" lang="zh-CN" altLang="en-US" dirty="0">
+              <a:solidFill>
+                <a:schemeClr val="tx1"/>
+              </a:solidFill>
+            </a:endParaRPr>
           </a:p>
         </p:txBody>
       </p:sp>
@@ -9283,10 +9459,18 @@
           <a:p>
             <a:pPr algn="ctr"/>
             <a:r>
-              <a:rPr kumimoji="1" lang="en-US" altLang="zh-CN" dirty="0"/>
+              <a:rPr kumimoji="1" lang="en-US" altLang="zh-CN" dirty="0">
+                <a:solidFill>
+                  <a:schemeClr val="tx1"/>
+                </a:solidFill>
+              </a:rPr>
               <a:t>t</a:t>
             </a:r>
-            <a:endParaRPr kumimoji="1" lang="zh-CN" altLang="en-US" dirty="0"/>
+            <a:endParaRPr kumimoji="1" lang="zh-CN" altLang="en-US" dirty="0">
+              <a:solidFill>
+                <a:schemeClr val="tx1"/>
+              </a:solidFill>
+            </a:endParaRPr>
           </a:p>
         </p:txBody>
       </p:sp>
@@ -18774,8 +18958,8 @@
           </a:p>
         </p:txBody>
       </p:sp>
-      <mc:AlternateContent xmlns:mc="http://schemas.openxmlformats.org/markup-compatibility/2006" xmlns:a14="http://schemas.microsoft.com/office/drawing/2010/main">
-        <mc:Choice Requires="a14">
+      <mc:AlternateContent xmlns:mc="http://schemas.openxmlformats.org/markup-compatibility/2006">
+        <mc:Choice xmlns:a14="http://schemas.microsoft.com/office/drawing/2010/main" Requires="a14">
           <p:graphicFrame>
             <p:nvGraphicFramePr>
               <p:cNvPr id="4" name="表格 3">
@@ -18791,7 +18975,7 @@
               <p:nvPr>
                 <p:extLst>
                   <p:ext uri="{D42A27DB-BD31-4B8C-83A1-F6EECF244321}">
-                    <p14:modId xmlns:p14="http://schemas.microsoft.com/office/powerpoint/2010/main" val="1455354468"/>
+                    <p14:modId xmlns:p14="http://schemas.microsoft.com/office/powerpoint/2010/main" val="3242709078"/>
                   </p:ext>
                 </p:extLst>
               </p:nvPr>
@@ -18836,10 +19020,18 @@
                         <a:lstStyle/>
                         <a:p>
                           <a:r>
-                            <a:rPr lang="en-US" altLang="zh-CN" dirty="0"/>
+                            <a:rPr lang="en-US" altLang="zh-CN" dirty="0">
+                              <a:solidFill>
+                                <a:schemeClr val="tx1"/>
+                              </a:solidFill>
+                            </a:rPr>
                             <a:t>Proposition</a:t>
                           </a:r>
-                          <a:endParaRPr lang="zh-CN" altLang="en-US" dirty="0"/>
+                          <a:endParaRPr lang="zh-CN" altLang="en-US" dirty="0">
+                            <a:solidFill>
+                              <a:schemeClr val="tx1"/>
+                            </a:solidFill>
+                          </a:endParaRPr>
                         </a:p>
                       </a:txBody>
                       <a:tcPr/>
@@ -18850,10 +19042,18 @@
                         <a:lstStyle/>
                         <a:p>
                           <a:r>
-                            <a:rPr lang="en-US" altLang="zh-CN" dirty="0"/>
+                            <a:rPr lang="en-US" altLang="zh-CN" dirty="0">
+                              <a:solidFill>
+                                <a:schemeClr val="tx1"/>
+                              </a:solidFill>
+                            </a:rPr>
                             <a:t>SAT/UNSAT</a:t>
                           </a:r>
-                          <a:endParaRPr lang="zh-CN" altLang="en-US" dirty="0"/>
+                          <a:endParaRPr lang="zh-CN" altLang="en-US" dirty="0">
+                            <a:solidFill>
+                              <a:schemeClr val="tx1"/>
+                            </a:solidFill>
+                          </a:endParaRPr>
                         </a:p>
                       </a:txBody>
                       <a:tcPr/>
@@ -18864,10 +19064,18 @@
                         <a:lstStyle/>
                         <a:p>
                           <a:r>
-                            <a:rPr lang="en-US" altLang="zh-CN" dirty="0"/>
+                            <a:rPr lang="en-US" altLang="zh-CN" dirty="0">
+                              <a:solidFill>
+                                <a:schemeClr val="tx1"/>
+                              </a:solidFill>
+                            </a:rPr>
                             <a:t>Theory</a:t>
                           </a:r>
-                          <a:endParaRPr lang="zh-CN" altLang="en-US" dirty="0"/>
+                          <a:endParaRPr lang="zh-CN" altLang="en-US" dirty="0">
+                            <a:solidFill>
+                              <a:schemeClr val="tx1"/>
+                            </a:solidFill>
+                          </a:endParaRPr>
                         </a:p>
                       </a:txBody>
                       <a:tcPr/>
@@ -19993,7 +20201,7 @@
             </a:graphic>
           </p:graphicFrame>
         </mc:Choice>
-        <mc:Fallback xmlns="">
+        <mc:Fallback>
           <p:graphicFrame>
             <p:nvGraphicFramePr>
               <p:cNvPr id="4" name="表格 3">
@@ -20009,7 +20217,7 @@
               <p:nvPr>
                 <p:extLst>
                   <p:ext uri="{D42A27DB-BD31-4B8C-83A1-F6EECF244321}">
-                    <p14:modId xmlns:p14="http://schemas.microsoft.com/office/powerpoint/2010/main" val="1455354468"/>
+                    <p14:modId xmlns:p14="http://schemas.microsoft.com/office/powerpoint/2010/main" val="3242709078"/>
                   </p:ext>
                 </p:extLst>
               </p:nvPr>
@@ -20054,10 +20262,18 @@
                         <a:lstStyle/>
                         <a:p>
                           <a:r>
-                            <a:rPr lang="en-US" altLang="zh-CN" dirty="0"/>
+                            <a:rPr lang="en-US" altLang="zh-CN" dirty="0">
+                              <a:solidFill>
+                                <a:schemeClr val="tx1"/>
+                              </a:solidFill>
+                            </a:rPr>
                             <a:t>Proposition</a:t>
                           </a:r>
-                          <a:endParaRPr lang="zh-CN" altLang="en-US" dirty="0"/>
+                          <a:endParaRPr lang="zh-CN" altLang="en-US" dirty="0">
+                            <a:solidFill>
+                              <a:schemeClr val="tx1"/>
+                            </a:solidFill>
+                          </a:endParaRPr>
                         </a:p>
                       </a:txBody>
                       <a:tcPr/>
@@ -20068,10 +20284,18 @@
                         <a:lstStyle/>
                         <a:p>
                           <a:r>
-                            <a:rPr lang="en-US" altLang="zh-CN" dirty="0"/>
+                            <a:rPr lang="en-US" altLang="zh-CN" dirty="0">
+                              <a:solidFill>
+                                <a:schemeClr val="tx1"/>
+                              </a:solidFill>
+                            </a:rPr>
                             <a:t>SAT/UNSAT</a:t>
                           </a:r>
-                          <a:endParaRPr lang="zh-CN" altLang="en-US" dirty="0"/>
+                          <a:endParaRPr lang="zh-CN" altLang="en-US" dirty="0">
+                            <a:solidFill>
+                              <a:schemeClr val="tx1"/>
+                            </a:solidFill>
+                          </a:endParaRPr>
                         </a:p>
                       </a:txBody>
                       <a:tcPr/>
@@ -20082,10 +20306,18 @@
                         <a:lstStyle/>
                         <a:p>
                           <a:r>
-                            <a:rPr lang="en-US" altLang="zh-CN" dirty="0"/>
+                            <a:rPr lang="en-US" altLang="zh-CN" dirty="0">
+                              <a:solidFill>
+                                <a:schemeClr val="tx1"/>
+                              </a:solidFill>
+                            </a:rPr>
                             <a:t>Theory</a:t>
                           </a:r>
-                          <a:endParaRPr lang="zh-CN" altLang="en-US" dirty="0"/>
+                          <a:endParaRPr lang="zh-CN" altLang="en-US" dirty="0">
+                            <a:solidFill>
+                              <a:schemeClr val="tx1"/>
+                            </a:solidFill>
+                          </a:endParaRPr>
                         </a:p>
                       </a:txBody>
                       <a:tcPr/>
@@ -20109,7 +20341,7 @@
                         <a:blipFill>
                           <a:blip r:embed="rId2"/>
                           <a:stretch>
-                            <a:fillRect l="-355" t="-175862" r="-130496" b="-779310"/>
+                            <a:fillRect l="-355" t="-175862" r="-130851" b="-782759"/>
                           </a:stretch>
                         </a:blipFill>
                       </a:tcPr>
@@ -20160,7 +20392,7 @@
                         <a:blipFill>
                           <a:blip r:embed="rId2"/>
                           <a:stretch>
-                            <a:fillRect l="-355" t="-266667" r="-130496" b="-653333"/>
+                            <a:fillRect l="-355" t="-266667" r="-130851" b="-656667"/>
                           </a:stretch>
                         </a:blipFill>
                       </a:tcPr>
@@ -20219,7 +20451,7 @@
                         <a:blipFill>
                           <a:blip r:embed="rId2"/>
                           <a:stretch>
-                            <a:fillRect l="-355" t="-200000" r="-130496" b="-256364"/>
+                            <a:fillRect l="-355" t="-200000" r="-130851" b="-258182"/>
                           </a:stretch>
                         </a:blipFill>
                       </a:tcPr>
@@ -20236,7 +20468,7 @@
                         <a:blipFill>
                           <a:blip r:embed="rId2"/>
                           <a:stretch>
-                            <a:fillRect l="-174691" t="-200000" r="-127160" b="-256364"/>
+                            <a:fillRect l="-174691" t="-200000" r="-127778" b="-258182"/>
                           </a:stretch>
                         </a:blipFill>
                       </a:tcPr>
@@ -20284,7 +20516,7 @@
                         <a:blipFill>
                           <a:blip r:embed="rId2"/>
                           <a:stretch>
-                            <a:fillRect l="-355" t="-568966" r="-130496" b="-386207"/>
+                            <a:fillRect l="-355" t="-568966" r="-130851" b="-389655"/>
                           </a:stretch>
                         </a:blipFill>
                       </a:tcPr>
@@ -20335,7 +20567,7 @@
                         <a:blipFill>
                           <a:blip r:embed="rId2"/>
                           <a:stretch>
-                            <a:fillRect l="-355" t="-646667" r="-130496" b="-273333"/>
+                            <a:fillRect l="-355" t="-646667" r="-130851" b="-276667"/>
                           </a:stretch>
                         </a:blipFill>
                       </a:tcPr>
@@ -20386,7 +20618,7 @@
                         <a:blipFill>
                           <a:blip r:embed="rId2"/>
                           <a:stretch>
-                            <a:fillRect l="-355" t="-772414" r="-130496" b="-182759"/>
+                            <a:fillRect l="-355" t="-772414" r="-130851" b="-186207"/>
                           </a:stretch>
                         </a:blipFill>
                       </a:tcPr>
@@ -26533,7 +26765,11 @@
                 <a:buNone/>
               </a:pPr>
               <a:r>
-                <a:rPr lang="en-US" sz="3400" kern="1200" dirty="0"/>
+                <a:rPr lang="en-US" sz="3400" kern="1200" dirty="0">
+                  <a:solidFill>
+                    <a:schemeClr val="tx1"/>
+                  </a:solidFill>
+                </a:rPr>
                 <a:t>SAT</a:t>
               </a:r>
             </a:p>
@@ -26812,7 +27048,11 @@
                 <a:buNone/>
               </a:pPr>
               <a:r>
-                <a:rPr lang="en-US" sz="2800" kern="1200" dirty="0"/>
+                <a:rPr lang="en-US" sz="2800" kern="1200" dirty="0">
+                  <a:solidFill>
+                    <a:schemeClr val="tx1"/>
+                  </a:solidFill>
+                </a:rPr>
                 <a:t>Theory</a:t>
               </a:r>
             </a:p>
@@ -26830,7 +27070,11 @@
                 <a:buNone/>
               </a:pPr>
               <a:r>
-                <a:rPr lang="en-US" sz="2800" kern="1200" dirty="0"/>
+                <a:rPr lang="en-US" sz="2800" kern="1200" dirty="0">
+                  <a:solidFill>
+                    <a:schemeClr val="tx1"/>
+                  </a:solidFill>
+                </a:rPr>
                 <a:t>Solvers</a:t>
               </a:r>
             </a:p>
@@ -27109,7 +27353,11 @@
                 <a:buNone/>
               </a:pPr>
               <a:r>
-                <a:rPr lang="en-US" sz="3400" kern="1200" dirty="0"/>
+                <a:rPr lang="en-US" sz="3400" kern="1200" dirty="0">
+                  <a:solidFill>
+                    <a:schemeClr val="tx1"/>
+                  </a:solidFill>
+                </a:rPr>
                 <a:t>SMT</a:t>
               </a:r>
             </a:p>
@@ -30319,10 +30567,18 @@
           <a:p>
             <a:pPr algn="ctr"/>
             <a:r>
-              <a:rPr kumimoji="1" lang="en-US" altLang="zh-CN" dirty="0"/>
+              <a:rPr kumimoji="1" lang="en-US" altLang="zh-CN" dirty="0">
+                <a:solidFill>
+                  <a:schemeClr val="tx1"/>
+                </a:solidFill>
+              </a:rPr>
               <a:t>a</a:t>
             </a:r>
-            <a:endParaRPr kumimoji="1" lang="zh-CN" altLang="en-US" dirty="0"/>
+            <a:endParaRPr kumimoji="1" lang="zh-CN" altLang="en-US" dirty="0">
+              <a:solidFill>
+                <a:schemeClr val="tx1"/>
+              </a:solidFill>
+            </a:endParaRPr>
           </a:p>
         </p:txBody>
       </p:sp>
@@ -30369,10 +30625,18 @@
           <a:p>
             <a:pPr algn="ctr"/>
             <a:r>
-              <a:rPr kumimoji="1" lang="en-US" altLang="zh-CN" dirty="0"/>
+              <a:rPr kumimoji="1" lang="en-US" altLang="zh-CN" dirty="0">
+                <a:solidFill>
+                  <a:schemeClr val="tx1"/>
+                </a:solidFill>
+              </a:rPr>
               <a:t>b</a:t>
             </a:r>
-            <a:endParaRPr kumimoji="1" lang="zh-CN" altLang="en-US" dirty="0"/>
+            <a:endParaRPr kumimoji="1" lang="zh-CN" altLang="en-US" dirty="0">
+              <a:solidFill>
+                <a:schemeClr val="tx1"/>
+              </a:solidFill>
+            </a:endParaRPr>
           </a:p>
         </p:txBody>
       </p:sp>
@@ -30419,10 +30683,18 @@
           <a:p>
             <a:pPr algn="ctr"/>
             <a:r>
-              <a:rPr kumimoji="1" lang="en-US" altLang="zh-CN" dirty="0"/>
+              <a:rPr kumimoji="1" lang="en-US" altLang="zh-CN" dirty="0">
+                <a:solidFill>
+                  <a:schemeClr val="tx1"/>
+                </a:solidFill>
+              </a:rPr>
               <a:t>c</a:t>
             </a:r>
-            <a:endParaRPr kumimoji="1" lang="zh-CN" altLang="en-US" dirty="0"/>
+            <a:endParaRPr kumimoji="1" lang="zh-CN" altLang="en-US" dirty="0">
+              <a:solidFill>
+                <a:schemeClr val="tx1"/>
+              </a:solidFill>
+            </a:endParaRPr>
           </a:p>
         </p:txBody>
       </p:sp>
@@ -30469,10 +30741,18 @@
           <a:p>
             <a:pPr algn="ctr"/>
             <a:r>
-              <a:rPr kumimoji="1" lang="en-US" altLang="zh-CN" dirty="0"/>
+              <a:rPr kumimoji="1" lang="en-US" altLang="zh-CN" dirty="0">
+                <a:solidFill>
+                  <a:schemeClr val="tx1"/>
+                </a:solidFill>
+              </a:rPr>
               <a:t>d</a:t>
             </a:r>
-            <a:endParaRPr kumimoji="1" lang="zh-CN" altLang="en-US" dirty="0"/>
+            <a:endParaRPr kumimoji="1" lang="zh-CN" altLang="en-US" dirty="0">
+              <a:solidFill>
+                <a:schemeClr val="tx1"/>
+              </a:solidFill>
+            </a:endParaRPr>
           </a:p>
         </p:txBody>
       </p:sp>
@@ -30519,10 +30799,18 @@
           <a:p>
             <a:pPr algn="ctr"/>
             <a:r>
-              <a:rPr kumimoji="1" lang="en-US" altLang="zh-CN" dirty="0"/>
+              <a:rPr kumimoji="1" lang="en-US" altLang="zh-CN" dirty="0">
+                <a:solidFill>
+                  <a:schemeClr val="tx1"/>
+                </a:solidFill>
+              </a:rPr>
               <a:t>e</a:t>
             </a:r>
-            <a:endParaRPr kumimoji="1" lang="zh-CN" altLang="en-US" dirty="0"/>
+            <a:endParaRPr kumimoji="1" lang="zh-CN" altLang="en-US" dirty="0">
+              <a:solidFill>
+                <a:schemeClr val="tx1"/>
+              </a:solidFill>
+            </a:endParaRPr>
           </a:p>
         </p:txBody>
       </p:sp>
@@ -30569,10 +30857,18 @@
           <a:p>
             <a:pPr algn="ctr"/>
             <a:r>
-              <a:rPr kumimoji="1" lang="en-US" altLang="zh-CN" dirty="0"/>
+              <a:rPr kumimoji="1" lang="en-US" altLang="zh-CN" dirty="0">
+                <a:solidFill>
+                  <a:schemeClr val="tx1"/>
+                </a:solidFill>
+              </a:rPr>
               <a:t>s</a:t>
             </a:r>
-            <a:endParaRPr kumimoji="1" lang="zh-CN" altLang="en-US" dirty="0"/>
+            <a:endParaRPr kumimoji="1" lang="zh-CN" altLang="en-US" dirty="0">
+              <a:solidFill>
+                <a:schemeClr val="tx1"/>
+              </a:solidFill>
+            </a:endParaRPr>
           </a:p>
         </p:txBody>
       </p:sp>
@@ -30619,10 +30915,18 @@
           <a:p>
             <a:pPr algn="ctr"/>
             <a:r>
-              <a:rPr kumimoji="1" lang="en-US" altLang="zh-CN" dirty="0"/>
+              <a:rPr kumimoji="1" lang="en-US" altLang="zh-CN" dirty="0">
+                <a:solidFill>
+                  <a:schemeClr val="tx1"/>
+                </a:solidFill>
+              </a:rPr>
               <a:t>t</a:t>
             </a:r>
-            <a:endParaRPr kumimoji="1" lang="zh-CN" altLang="en-US" dirty="0"/>
+            <a:endParaRPr kumimoji="1" lang="zh-CN" altLang="en-US" dirty="0">
+              <a:solidFill>
+                <a:schemeClr val="tx1"/>
+              </a:solidFill>
+            </a:endParaRPr>
           </a:p>
         </p:txBody>
       </p:sp>
